--- a/Apresentacao_em_Power_Point/Apresentacao_Executiva.pptx
+++ b/Apresentacao_em_Power_Point/Apresentacao_Executiva.pptx
@@ -238,7 +238,7 @@
           <a:p>
             <a:fld id="{A9A06AB7-22F7-4FE9-97DA-D7277530E6A8}" type="datetimeFigureOut">
               <a:rPr lang="pt-BR" smtClean="0"/>
-              <a:t>31/07/2022</a:t>
+              <a:t>28/10/2022</a:t>
             </a:fld>
             <a:endParaRPr lang="pt-BR"/>
           </a:p>
@@ -1107,7 +1107,7 @@
             <a:fld id="{1D8BD707-D9CF-40AE-B4C6-C98DA3205C09}" type="datetimeFigureOut">
               <a:rPr lang="en-US" smtClean="0"/>
               <a:pPr/>
-              <a:t>7/31/2022</a:t>
+              <a:t>10/28/2022</a:t>
             </a:fld>
             <a:endParaRPr lang="en-US"/>
           </a:p>
@@ -1274,7 +1274,7 @@
             <a:fld id="{1D8BD707-D9CF-40AE-B4C6-C98DA3205C09}" type="datetimeFigureOut">
               <a:rPr lang="en-US" smtClean="0"/>
               <a:pPr/>
-              <a:t>7/31/2022</a:t>
+              <a:t>10/28/2022</a:t>
             </a:fld>
             <a:endParaRPr lang="en-US"/>
           </a:p>
@@ -1451,7 +1451,7 @@
             <a:fld id="{1D8BD707-D9CF-40AE-B4C6-C98DA3205C09}" type="datetimeFigureOut">
               <a:rPr lang="en-US" smtClean="0"/>
               <a:pPr/>
-              <a:t>7/31/2022</a:t>
+              <a:t>10/28/2022</a:t>
             </a:fld>
             <a:endParaRPr lang="en-US"/>
           </a:p>
@@ -1618,7 +1618,7 @@
             <a:fld id="{1D8BD707-D9CF-40AE-B4C6-C98DA3205C09}" type="datetimeFigureOut">
               <a:rPr lang="en-US" smtClean="0"/>
               <a:pPr/>
-              <a:t>7/31/2022</a:t>
+              <a:t>10/28/2022</a:t>
             </a:fld>
             <a:endParaRPr lang="en-US"/>
           </a:p>
@@ -1861,7 +1861,7 @@
             <a:fld id="{1D8BD707-D9CF-40AE-B4C6-C98DA3205C09}" type="datetimeFigureOut">
               <a:rPr lang="en-US" smtClean="0"/>
               <a:pPr/>
-              <a:t>7/31/2022</a:t>
+              <a:t>10/28/2022</a:t>
             </a:fld>
             <a:endParaRPr lang="en-US"/>
           </a:p>
@@ -2146,7 +2146,7 @@
             <a:fld id="{1D8BD707-D9CF-40AE-B4C6-C98DA3205C09}" type="datetimeFigureOut">
               <a:rPr lang="en-US" smtClean="0"/>
               <a:pPr/>
-              <a:t>7/31/2022</a:t>
+              <a:t>10/28/2022</a:t>
             </a:fld>
             <a:endParaRPr lang="en-US"/>
           </a:p>
@@ -2565,7 +2565,7 @@
             <a:fld id="{1D8BD707-D9CF-40AE-B4C6-C98DA3205C09}" type="datetimeFigureOut">
               <a:rPr lang="en-US" smtClean="0"/>
               <a:pPr/>
-              <a:t>7/31/2022</a:t>
+              <a:t>10/28/2022</a:t>
             </a:fld>
             <a:endParaRPr lang="en-US"/>
           </a:p>
@@ -2680,7 +2680,7 @@
             <a:fld id="{1D8BD707-D9CF-40AE-B4C6-C98DA3205C09}" type="datetimeFigureOut">
               <a:rPr lang="en-US" smtClean="0"/>
               <a:pPr/>
-              <a:t>7/31/2022</a:t>
+              <a:t>10/28/2022</a:t>
             </a:fld>
             <a:endParaRPr lang="en-US"/>
           </a:p>
@@ -2772,7 +2772,7 @@
             <a:fld id="{1D8BD707-D9CF-40AE-B4C6-C98DA3205C09}" type="datetimeFigureOut">
               <a:rPr lang="en-US" smtClean="0"/>
               <a:pPr/>
-              <a:t>7/31/2022</a:t>
+              <a:t>10/28/2022</a:t>
             </a:fld>
             <a:endParaRPr lang="en-US"/>
           </a:p>
@@ -3046,7 +3046,7 @@
             <a:fld id="{1D8BD707-D9CF-40AE-B4C6-C98DA3205C09}" type="datetimeFigureOut">
               <a:rPr lang="en-US" smtClean="0"/>
               <a:pPr/>
-              <a:t>7/31/2022</a:t>
+              <a:t>10/28/2022</a:t>
             </a:fld>
             <a:endParaRPr lang="en-US"/>
           </a:p>
@@ -3300,7 +3300,7 @@
             <a:fld id="{1D8BD707-D9CF-40AE-B4C6-C98DA3205C09}" type="datetimeFigureOut">
               <a:rPr lang="en-US" smtClean="0"/>
               <a:pPr/>
-              <a:t>7/31/2022</a:t>
+              <a:t>10/28/2022</a:t>
             </a:fld>
             <a:endParaRPr lang="en-US"/>
           </a:p>
@@ -3510,7 +3510,7 @@
             <a:fld id="{1D8BD707-D9CF-40AE-B4C6-C98DA3205C09}" type="datetimeFigureOut">
               <a:rPr lang="en-US" smtClean="0"/>
               <a:pPr/>
-              <a:t>7/31/2022</a:t>
+              <a:t>10/28/2022</a:t>
             </a:fld>
             <a:endParaRPr lang="en-US"/>
           </a:p>
@@ -4334,10 +4334,10 @@
       </p:sp>
       <p:pic>
         <p:nvPicPr>
-          <p:cNvPr id="4" name="Imagem 3">
+          <p:cNvPr id="3" name="Imagem 2">
             <a:extLst>
               <a:ext uri="{FF2B5EF4-FFF2-40B4-BE49-F238E27FC236}">
-                <a16:creationId xmlns:a16="http://schemas.microsoft.com/office/drawing/2014/main" id="{4CBE4DA0-DFDB-469F-BC24-0413224DFB87}"/>
+                <a16:creationId xmlns:a16="http://schemas.microsoft.com/office/drawing/2014/main" id="{6DBC29BC-E67F-D953-11D3-0D1CD14836FB}"/>
               </a:ext>
             </a:extLst>
           </p:cNvPr>
@@ -4370,8 +4370,8 @@
         </p:blipFill>
         <p:spPr>
           <a:xfrm>
-            <a:off x="450898" y="4322918"/>
-            <a:ext cx="17386203" cy="5179169"/>
+            <a:off x="556506" y="4149751"/>
+            <a:ext cx="17174988" cy="5352336"/>
           </a:xfrm>
           <a:prstGeom prst="rect">
             <a:avLst/>
